--- a/classes/parte-1-machine-learning-clasico/054-proyecto-end-to-end-vision-datos-exploracion-preparacion/clase-054-proyecto-end-to-end-vision-datos-exploracion-preparacion-presentacion.pptx
+++ b/classes/parte-1-machine-learning-clasico/054-proyecto-end-to-end-vision-datos-exploracion-preparacion/clase-054-proyecto-end-to-end-vision-datos-exploracion-preparacion-presentacion.pptx
@@ -4955,7 +4955,7 @@
                 </a:solidFill>
                 <a:latin typeface="Segoe UI"/>
               </a:rPr>
-              <a:t>Primer bloque ejecutable del notebook.</a:t>
+              <a:t>Primera mitad de un proyecto real: framing, EDA, split estratificado sin contaminarse y un Pipeline + ColumnTransformer que limpia, encodea y escala sin data leakage. Usamos un dataset sintético tipo "housing" (numéricas + categórica + NaN) para correr offline.</a:t>
             </a:r>
           </a:p>
         </p:txBody>
@@ -5042,7 +5042,235 @@
                 </a:solidFill>
                 <a:latin typeface="Courier New"/>
               </a:rPr>
-              <a:t># Imports y configuración inicial</a:t>
+              <a:t>import numpy as np</a:t>
+            </a:r>
+          </a:p>
+          <a:p>
+            <a:pPr>
+              <a:defRPr sz="1200" b="0">
+                <a:solidFill>
+                  <a:srgbClr val="F8FAFC"/>
+                </a:solidFill>
+                <a:latin typeface="Courier New"/>
+              </a:defRPr>
+            </a:pPr>
+            <a:r>
+              <a:rPr sz="1200" b="0">
+                <a:solidFill>
+                  <a:srgbClr val="F8FAFC"/>
+                </a:solidFill>
+                <a:latin typeface="Courier New"/>
+              </a:rPr>
+              <a:t>import pandas as pd</a:t>
+            </a:r>
+          </a:p>
+          <a:p>
+            <a:pPr>
+              <a:defRPr sz="1200" b="0">
+                <a:solidFill>
+                  <a:srgbClr val="F8FAFC"/>
+                </a:solidFill>
+                <a:latin typeface="Courier New"/>
+              </a:defRPr>
+            </a:pPr>
+            <a:r>
+              <a:rPr sz="1200" b="0">
+                <a:solidFill>
+                  <a:srgbClr val="F8FAFC"/>
+                </a:solidFill>
+                <a:latin typeface="Courier New"/>
+              </a:rPr>
+              <a:t>import matplotlib.pyplot as plt</a:t>
+            </a:r>
+          </a:p>
+          <a:p>
+            <a:pPr>
+              <a:defRPr sz="1200" b="0">
+                <a:solidFill>
+                  <a:srgbClr val="F8FAFC"/>
+                </a:solidFill>
+                <a:latin typeface="Courier New"/>
+              </a:defRPr>
+            </a:pPr>
+            <a:r>
+              <a:rPr sz="1200" b="0">
+                <a:solidFill>
+                  <a:srgbClr val="F8FAFC"/>
+                </a:solidFill>
+                <a:latin typeface="Courier New"/>
+              </a:rPr>
+              <a:t>from sklearn.model_selection import StratifiedShuffleSplit</a:t>
+            </a:r>
+          </a:p>
+          <a:p>
+            <a:pPr>
+              <a:defRPr sz="1200" b="0">
+                <a:solidFill>
+                  <a:srgbClr val="F8FAFC"/>
+                </a:solidFill>
+                <a:latin typeface="Courier New"/>
+              </a:defRPr>
+            </a:pPr>
+            <a:r>
+              <a:rPr sz="1200" b="0">
+                <a:solidFill>
+                  <a:srgbClr val="F8FAFC"/>
+                </a:solidFill>
+                <a:latin typeface="Courier New"/>
+              </a:rPr>
+              <a:t>from sklearn.pipeline import Pipeline</a:t>
+            </a:r>
+          </a:p>
+          <a:p>
+            <a:pPr>
+              <a:defRPr sz="1200" b="0">
+                <a:solidFill>
+                  <a:srgbClr val="F8FAFC"/>
+                </a:solidFill>
+                <a:latin typeface="Courier New"/>
+              </a:defRPr>
+            </a:pPr>
+            <a:r>
+              <a:rPr sz="1200" b="0">
+                <a:solidFill>
+                  <a:srgbClr val="F8FAFC"/>
+                </a:solidFill>
+                <a:latin typeface="Courier New"/>
+              </a:rPr>
+              <a:t>from sklearn.compose import ColumnTransformer</a:t>
+            </a:r>
+          </a:p>
+          <a:p>
+            <a:pPr>
+              <a:defRPr sz="1200" b="0">
+                <a:solidFill>
+                  <a:srgbClr val="F8FAFC"/>
+                </a:solidFill>
+                <a:latin typeface="Courier New"/>
+              </a:defRPr>
+            </a:pPr>
+            <a:r>
+              <a:rPr sz="1200" b="0">
+                <a:solidFill>
+                  <a:srgbClr val="F8FAFC"/>
+                </a:solidFill>
+                <a:latin typeface="Courier New"/>
+              </a:rPr>
+              <a:t>from sklearn.impute import SimpleImputer</a:t>
+            </a:r>
+          </a:p>
+          <a:p>
+            <a:pPr>
+              <a:defRPr sz="1200" b="0">
+                <a:solidFill>
+                  <a:srgbClr val="F8FAFC"/>
+                </a:solidFill>
+                <a:latin typeface="Courier New"/>
+              </a:defRPr>
+            </a:pPr>
+            <a:r>
+              <a:rPr sz="1200" b="0">
+                <a:solidFill>
+                  <a:srgbClr val="F8FAFC"/>
+                </a:solidFill>
+                <a:latin typeface="Courier New"/>
+              </a:rPr>
+              <a:t>from sklearn.preprocessing import StandardScaler, OneHotEncoder</a:t>
+            </a:r>
+          </a:p>
+          <a:p>
+            <a:pPr>
+              <a:defRPr sz="1200" b="0">
+                <a:solidFill>
+                  <a:srgbClr val="F8FAFC"/>
+                </a:solidFill>
+                <a:latin typeface="Courier New"/>
+              </a:defRPr>
+            </a:pPr>
+            <a:r>
+              <a:rPr sz="1200" b="0">
+                <a:solidFill>
+                  <a:srgbClr val="F8FAFC"/>
+                </a:solidFill>
+                <a:latin typeface="Courier New"/>
+              </a:rPr>
+              <a:t>from sklearn.linear_model import LinearRegression</a:t>
+            </a:r>
+          </a:p>
+          <a:p>
+            <a:pPr>
+              <a:defRPr sz="1200" b="0">
+                <a:solidFill>
+                  <a:srgbClr val="F8FAFC"/>
+                </a:solidFill>
+                <a:latin typeface="Courier New"/>
+              </a:defRPr>
+            </a:pPr>
+            <a:r>
+              <a:rPr sz="1200" b="0">
+                <a:solidFill>
+                  <a:srgbClr val="F8FAFC"/>
+                </a:solidFill>
+                <a:latin typeface="Courier New"/>
+              </a:rPr>
+              <a:t>from sklearn.metrics import root_mean_squared_error</a:t>
+            </a:r>
+          </a:p>
+          <a:p>
+            <a:pPr>
+              <a:defRPr sz="1200" b="0">
+                <a:solidFill>
+                  <a:srgbClr val="F8FAFC"/>
+                </a:solidFill>
+                <a:latin typeface="Courier New"/>
+              </a:defRPr>
+            </a:pPr>
+            <a:r>
+              <a:rPr sz="1200" b="0">
+                <a:solidFill>
+                  <a:srgbClr val="F8FAFC"/>
+                </a:solidFill>
+                <a:latin typeface="Courier New"/>
+              </a:rPr>
+              <a:t> </a:t>
+            </a:r>
+          </a:p>
+          <a:p>
+            <a:pPr>
+              <a:defRPr sz="1200" b="0">
+                <a:solidFill>
+                  <a:srgbClr val="F8FAFC"/>
+                </a:solidFill>
+                <a:latin typeface="Courier New"/>
+              </a:defRPr>
+            </a:pPr>
+            <a:r>
+              <a:rPr sz="1200" b="0">
+                <a:solidFill>
+                  <a:srgbClr val="F8FAFC"/>
+                </a:solidFill>
+                <a:latin typeface="Courier New"/>
+              </a:rPr>
+              <a:t>np.random.seed(42)</a:t>
+            </a:r>
+          </a:p>
+          <a:p>
+            <a:pPr>
+              <a:defRPr sz="1200" b="0">
+                <a:solidFill>
+                  <a:srgbClr val="F8FAFC"/>
+                </a:solidFill>
+                <a:latin typeface="Courier New"/>
+              </a:defRPr>
+            </a:pPr>
+            <a:r>
+              <a:rPr sz="1200" b="0">
+                <a:solidFill>
+                  <a:srgbClr val="F8FAFC"/>
+                </a:solidFill>
+                <a:latin typeface="Courier New"/>
+              </a:rPr>
+              <a:t>rng = np.random.default_rng(42)</a:t>
             </a:r>
           </a:p>
         </p:txBody>

--- a/classes/parte-1-machine-learning-clasico/054-proyecto-end-to-end-vision-datos-exploracion-preparacion/clase-054-proyecto-end-to-end-vision-datos-exploracion-preparacion-presentacion.pptx
+++ b/classes/parte-1-machine-learning-clasico/054-proyecto-end-to-end-vision-datos-exploracion-preparacion/clase-054-proyecto-end-to-end-vision-datos-exploracion-preparacion-presentacion.pptx
@@ -3272,7 +3272,7 @@
                 </a:solidFill>
                 <a:latin typeface="Segoe UI"/>
               </a:rPr>
-              <a:t>Parte: 1 — Machine Learning Clásico · Fuente: Géron, cap. 2 (California Housing).  Duración estimada: 90 min.</a:t>
+              <a:t>Parte: 1 — Machine Learning Clásico · Fuente: Géron, cap. 2 (California Housing).  Duración estimada: 90 min. · Nivel: Básico-Intermedio</a:t>
             </a:r>
           </a:p>
         </p:txBody>
@@ -3581,7 +3581,7 @@
                 </a:solidFill>
                 <a:latin typeface="Segoe UI"/>
               </a:rPr>
-              <a:t>Parte: 1 — Machine Learning Clásico · Fuente: Géron, cap. 2 (California Housing).  Duración estimada: 90 min.</a:t>
+              <a:t>Parte: 1 — Machine Learning Clásico · Fuente: Géron, cap. 2 (California Housing).  Duración estimada: 90 min. · Nivel: Básico-Intermedio</a:t>
             </a:r>
           </a:p>
         </p:txBody>
